--- a/2023/2023-12-08-AI-Updates.pptx
+++ b/2023/2023-12-08-AI-Updates.pptx
@@ -8,7 +8,7 @@
     <p:notesMasterId r:id="rId22"/>
   </p:notesMasterIdLst>
   <p:sldIdLst>
-    <p:sldId id="256" r:id="rId2"/>
+    <p:sldId id="276" r:id="rId2"/>
     <p:sldId id="257" r:id="rId3"/>
     <p:sldId id="258" r:id="rId4"/>
     <p:sldId id="259" r:id="rId5"/>
@@ -276,6 +276,11 @@
       </a:defRPr>
     </a:lvl9pPr>
   </p:defaultTextStyle>
+  <p:extLst>
+    <p:ext uri="{EFAFB233-063F-42B5-8137-9DF3F51BA10A}">
+      <p15:sldGuideLst xmlns:p15="http://schemas.microsoft.com/office/powerpoint/2012/main"/>
+    </p:ext>
+  </p:extLst>
 </p:presentation>
 </file>
 
@@ -10071,7 +10076,7 @@
         <p:spPr>
           <a:xfrm>
             <a:off x="105050" y="1157128"/>
-            <a:ext cx="4342500" cy="2154900"/>
+            <a:ext cx="4342500" cy="3386400"/>
           </a:xfrm>
           <a:prstGeom prst="rect">
             <a:avLst/>
@@ -10196,7 +10201,7 @@
                   <a:srgbClr val="3C78D8"/>
                 </a:solidFill>
               </a:rPr>
-              <a:t>Misc</a:t>
+              <a:t>OpenAI App Store</a:t>
             </a:r>
             <a:endParaRPr sz="1600" b="1">
               <a:solidFill>
@@ -10224,7 +10229,7 @@
                   <a:srgbClr val="3C78D8"/>
                 </a:solidFill>
               </a:rPr>
-              <a:t>Nvidia TensorRT-LLM</a:t>
+              <a:t>Meta Purple Llama Safety Project</a:t>
             </a:r>
             <a:endParaRPr sz="1600" b="1">
               <a:solidFill>
@@ -10252,7 +10257,7 @@
                   <a:srgbClr val="3C78D8"/>
                 </a:solidFill>
               </a:rPr>
-              <a:t>Axolotl</a:t>
+              <a:t>Meta text2image</a:t>
             </a:r>
             <a:endParaRPr sz="1600" b="1">
               <a:solidFill>
@@ -10280,7 +10285,7 @@
                   <a:srgbClr val="3C78D8"/>
                 </a:solidFill>
               </a:rPr>
-              <a:t>Zero-Shot Learning / Testing</a:t>
+              <a:t>Microsoft Copilot updates</a:t>
             </a:r>
             <a:endParaRPr sz="1600" b="1">
               <a:solidFill>
@@ -10308,7 +10313,147 @@
                   <a:srgbClr val="3C78D8"/>
                 </a:solidFill>
               </a:rPr>
-              <a:t>Zephyr Models - helpful assistants </a:t>
+              <a:t>Building Knowledge Graphs with LLM</a:t>
+            </a:r>
+            <a:endParaRPr sz="1600" b="1">
+              <a:solidFill>
+                <a:srgbClr val="3C78D8"/>
+              </a:solidFill>
+            </a:endParaRPr>
+          </a:p>
+          <a:p>
+            <a:pPr marL="457200" lvl="0" indent="-330200" algn="l" rtl="0">
+              <a:spcBef>
+                <a:spcPts val="0"/>
+              </a:spcBef>
+              <a:spcAft>
+                <a:spcPts val="0"/>
+              </a:spcAft>
+              <a:buClr>
+                <a:srgbClr val="3C78D8"/>
+              </a:buClr>
+              <a:buSzPts val="1600"/>
+              <a:buChar char="●"/>
+            </a:pPr>
+            <a:r>
+              <a:rPr lang="en" sz="1600" b="1">
+                <a:solidFill>
+                  <a:srgbClr val="3C78D8"/>
+                </a:solidFill>
+              </a:rPr>
+              <a:t>Grok launch</a:t>
+            </a:r>
+            <a:endParaRPr sz="1600" b="1">
+              <a:solidFill>
+                <a:srgbClr val="3C78D8"/>
+              </a:solidFill>
+            </a:endParaRPr>
+          </a:p>
+          <a:p>
+            <a:pPr marL="457200" lvl="0" indent="-330200" algn="l" rtl="0">
+              <a:spcBef>
+                <a:spcPts val="0"/>
+              </a:spcBef>
+              <a:spcAft>
+                <a:spcPts val="0"/>
+              </a:spcAft>
+              <a:buClr>
+                <a:srgbClr val="3C78D8"/>
+              </a:buClr>
+              <a:buSzPts val="1600"/>
+              <a:buChar char="●"/>
+            </a:pPr>
+            <a:r>
+              <a:rPr lang="en" sz="1600" b="1">
+                <a:solidFill>
+                  <a:srgbClr val="3C78D8"/>
+                </a:solidFill>
+              </a:rPr>
+              <a:t>S-LoRA</a:t>
+            </a:r>
+            <a:endParaRPr sz="1600" b="1">
+              <a:solidFill>
+                <a:srgbClr val="3C78D8"/>
+              </a:solidFill>
+            </a:endParaRPr>
+          </a:p>
+          <a:p>
+            <a:pPr marL="457200" lvl="0" indent="-330200" algn="l" rtl="0">
+              <a:spcBef>
+                <a:spcPts val="0"/>
+              </a:spcBef>
+              <a:spcAft>
+                <a:spcPts val="0"/>
+              </a:spcAft>
+              <a:buClr>
+                <a:srgbClr val="3C78D8"/>
+              </a:buClr>
+              <a:buSzPts val="1600"/>
+              <a:buChar char="●"/>
+            </a:pPr>
+            <a:r>
+              <a:rPr lang="en" sz="1600" b="1">
+                <a:solidFill>
+                  <a:srgbClr val="3C78D8"/>
+                </a:solidFill>
+              </a:rPr>
+              <a:t>MLX framework for Apple Silicon</a:t>
+            </a:r>
+            <a:endParaRPr sz="1600" b="1">
+              <a:solidFill>
+                <a:srgbClr val="3C78D8"/>
+              </a:solidFill>
+            </a:endParaRPr>
+          </a:p>
+          <a:p>
+            <a:pPr marL="457200" lvl="0" indent="-330200" algn="l" rtl="0">
+              <a:spcBef>
+                <a:spcPts val="0"/>
+              </a:spcBef>
+              <a:spcAft>
+                <a:spcPts val="0"/>
+              </a:spcAft>
+              <a:buClr>
+                <a:srgbClr val="3C78D8"/>
+              </a:buClr>
+              <a:buSzPts val="1600"/>
+              <a:buChar char="●"/>
+            </a:pPr>
+            <a:r>
+              <a:rPr lang="en" sz="1600" b="1">
+                <a:solidFill>
+                  <a:srgbClr val="3C78D8"/>
+                </a:solidFill>
+              </a:rPr>
+              <a:t>AI.gov</a:t>
+            </a:r>
+            <a:endParaRPr sz="1600" b="1">
+              <a:solidFill>
+                <a:srgbClr val="3C78D8"/>
+              </a:solidFill>
+            </a:endParaRPr>
+          </a:p>
+          <a:p>
+            <a:pPr marL="457200" lvl="0" indent="-330200" algn="l" rtl="0">
+              <a:spcBef>
+                <a:spcPts val="0"/>
+              </a:spcBef>
+              <a:spcAft>
+                <a:spcPts val="0"/>
+              </a:spcAft>
+              <a:buClr>
+                <a:srgbClr val="3C78D8"/>
+              </a:buClr>
+              <a:buSzPts val="1600"/>
+              <a:buChar char="●"/>
+            </a:pPr>
+            <a:r>
+              <a:rPr lang="en" sz="1600" b="1">
+                <a:solidFill>
+                  <a:srgbClr val="3C78D8"/>
+                </a:solidFill>
+              </a:rPr>
+              <a:t>AI Alliance</a:t>
             </a:r>
             <a:endParaRPr sz="1600" b="1">
               <a:solidFill>
@@ -10327,7 +10472,7 @@
         <p:spPr>
           <a:xfrm>
             <a:off x="4573850" y="1155206"/>
-            <a:ext cx="4441200" cy="2154900"/>
+            <a:ext cx="4441200" cy="3140100"/>
           </a:xfrm>
           <a:prstGeom prst="rect">
             <a:avLst/>
@@ -10348,6 +10493,118 @@
             <a:spAutoFit/>
           </a:bodyPr>
           <a:lstStyle/>
+          <a:p>
+            <a:pPr marL="457200" lvl="0" indent="-330200" algn="l" rtl="0">
+              <a:spcBef>
+                <a:spcPts val="0"/>
+              </a:spcBef>
+              <a:spcAft>
+                <a:spcPts val="0"/>
+              </a:spcAft>
+              <a:buClr>
+                <a:srgbClr val="3C78D8"/>
+              </a:buClr>
+              <a:buSzPts val="1600"/>
+              <a:buChar char="●"/>
+            </a:pPr>
+            <a:r>
+              <a:rPr lang="en" sz="1600" b="1">
+                <a:solidFill>
+                  <a:srgbClr val="3C78D8"/>
+                </a:solidFill>
+              </a:rPr>
+              <a:t>Nvidia TensorRT-LLM</a:t>
+            </a:r>
+            <a:endParaRPr sz="1600" b="1">
+              <a:solidFill>
+                <a:srgbClr val="3C78D8"/>
+              </a:solidFill>
+            </a:endParaRPr>
+          </a:p>
+          <a:p>
+            <a:pPr marL="457200" lvl="0" indent="-330200" algn="l" rtl="0">
+              <a:spcBef>
+                <a:spcPts val="0"/>
+              </a:spcBef>
+              <a:spcAft>
+                <a:spcPts val="0"/>
+              </a:spcAft>
+              <a:buClr>
+                <a:srgbClr val="3C78D8"/>
+              </a:buClr>
+              <a:buSzPts val="1600"/>
+              <a:buChar char="●"/>
+            </a:pPr>
+            <a:r>
+              <a:rPr lang="en" sz="1600" b="1">
+                <a:solidFill>
+                  <a:srgbClr val="3C78D8"/>
+                </a:solidFill>
+              </a:rPr>
+              <a:t>Axolotl</a:t>
+            </a:r>
+            <a:endParaRPr sz="1600" b="1">
+              <a:solidFill>
+                <a:srgbClr val="3C78D8"/>
+              </a:solidFill>
+            </a:endParaRPr>
+          </a:p>
+          <a:p>
+            <a:pPr marL="457200" lvl="0" indent="-330200" algn="l" rtl="0">
+              <a:spcBef>
+                <a:spcPts val="0"/>
+              </a:spcBef>
+              <a:spcAft>
+                <a:spcPts val="0"/>
+              </a:spcAft>
+              <a:buClr>
+                <a:srgbClr val="3C78D8"/>
+              </a:buClr>
+              <a:buSzPts val="1600"/>
+              <a:buChar char="●"/>
+            </a:pPr>
+            <a:r>
+              <a:rPr lang="en" sz="1600" b="1">
+                <a:solidFill>
+                  <a:srgbClr val="3C78D8"/>
+                </a:solidFill>
+              </a:rPr>
+              <a:t>Zero-Shot Learning / Testing</a:t>
+            </a:r>
+            <a:endParaRPr sz="1600" b="1">
+              <a:solidFill>
+                <a:srgbClr val="3C78D8"/>
+              </a:solidFill>
+            </a:endParaRPr>
+          </a:p>
+          <a:p>
+            <a:pPr marL="457200" lvl="0" indent="-330200" algn="l" rtl="0">
+              <a:spcBef>
+                <a:spcPts val="0"/>
+              </a:spcBef>
+              <a:spcAft>
+                <a:spcPts val="0"/>
+              </a:spcAft>
+              <a:buClr>
+                <a:srgbClr val="3C78D8"/>
+              </a:buClr>
+              <a:buSzPts val="1600"/>
+              <a:buChar char="●"/>
+            </a:pPr>
+            <a:r>
+              <a:rPr lang="en" sz="1600" b="1">
+                <a:solidFill>
+                  <a:srgbClr val="3C78D8"/>
+                </a:solidFill>
+              </a:rPr>
+              <a:t>Zephyr Models - helpful assistants</a:t>
+            </a:r>
+            <a:endParaRPr sz="1600" b="1">
+              <a:solidFill>
+                <a:srgbClr val="3C78D8"/>
+              </a:solidFill>
+            </a:endParaRPr>
+          </a:p>
           <a:p>
             <a:pPr marL="457200" lvl="0" indent="-330200" algn="l" rtl="0">
               <a:spcBef>
